--- a/Day3/Day3.pptx
+++ b/Day3/Day3.pptx
@@ -10,16 +10,19 @@
     <p:sldId id="258" r:id="rId4"/>
     <p:sldId id="298" r:id="rId5"/>
     <p:sldId id="299" r:id="rId6"/>
-    <p:sldId id="301" r:id="rId7"/>
-    <p:sldId id="302" r:id="rId8"/>
-    <p:sldId id="304" r:id="rId9"/>
-    <p:sldId id="303" r:id="rId10"/>
-    <p:sldId id="260" r:id="rId11"/>
-    <p:sldId id="261" r:id="rId12"/>
-    <p:sldId id="263" r:id="rId13"/>
-    <p:sldId id="297" r:id="rId14"/>
-    <p:sldId id="262" r:id="rId15"/>
-    <p:sldId id="300" r:id="rId16"/>
+    <p:sldId id="305" r:id="rId7"/>
+    <p:sldId id="301" r:id="rId8"/>
+    <p:sldId id="302" r:id="rId9"/>
+    <p:sldId id="304" r:id="rId10"/>
+    <p:sldId id="303" r:id="rId11"/>
+    <p:sldId id="306" r:id="rId12"/>
+    <p:sldId id="260" r:id="rId13"/>
+    <p:sldId id="307" r:id="rId14"/>
+    <p:sldId id="261" r:id="rId15"/>
+    <p:sldId id="263" r:id="rId16"/>
+    <p:sldId id="297" r:id="rId17"/>
+    <p:sldId id="262" r:id="rId18"/>
+    <p:sldId id="300" r:id="rId19"/>
   </p:sldIdLst>
   <p:sldSz cx="12192000" cy="6858000"/>
   <p:notesSz cx="6858000" cy="9144000"/>
@@ -273,7 +276,7 @@
           <a:p>
             <a:fld id="{BB564CA7-0CEF-499B-B9E9-84DBEC3A2B3C}" type="datetimeFigureOut">
               <a:rPr lang="zh-TW" altLang="en-US" smtClean="0"/>
-              <a:t>2026/4/10</a:t>
+              <a:t>2026/5/8</a:t>
             </a:fld>
             <a:endParaRPr lang="zh-TW" altLang="en-US"/>
           </a:p>
@@ -471,7 +474,7 @@
           <a:p>
             <a:fld id="{BB564CA7-0CEF-499B-B9E9-84DBEC3A2B3C}" type="datetimeFigureOut">
               <a:rPr lang="zh-TW" altLang="en-US" smtClean="0"/>
-              <a:t>2026/4/10</a:t>
+              <a:t>2026/5/8</a:t>
             </a:fld>
             <a:endParaRPr lang="zh-TW" altLang="en-US"/>
           </a:p>
@@ -679,7 +682,7 @@
           <a:p>
             <a:fld id="{BB564CA7-0CEF-499B-B9E9-84DBEC3A2B3C}" type="datetimeFigureOut">
               <a:rPr lang="zh-TW" altLang="en-US" smtClean="0"/>
-              <a:t>2026/4/10</a:t>
+              <a:t>2026/5/8</a:t>
             </a:fld>
             <a:endParaRPr lang="zh-TW" altLang="en-US"/>
           </a:p>
@@ -877,7 +880,7 @@
           <a:p>
             <a:fld id="{BB564CA7-0CEF-499B-B9E9-84DBEC3A2B3C}" type="datetimeFigureOut">
               <a:rPr lang="zh-TW" altLang="en-US" smtClean="0"/>
-              <a:t>2026/4/10</a:t>
+              <a:t>2026/5/8</a:t>
             </a:fld>
             <a:endParaRPr lang="zh-TW" altLang="en-US"/>
           </a:p>
@@ -1152,7 +1155,7 @@
           <a:p>
             <a:fld id="{BB564CA7-0CEF-499B-B9E9-84DBEC3A2B3C}" type="datetimeFigureOut">
               <a:rPr lang="zh-TW" altLang="en-US" smtClean="0"/>
-              <a:t>2026/4/10</a:t>
+              <a:t>2026/5/8</a:t>
             </a:fld>
             <a:endParaRPr lang="zh-TW" altLang="en-US"/>
           </a:p>
@@ -1417,7 +1420,7 @@
           <a:p>
             <a:fld id="{BB564CA7-0CEF-499B-B9E9-84DBEC3A2B3C}" type="datetimeFigureOut">
               <a:rPr lang="zh-TW" altLang="en-US" smtClean="0"/>
-              <a:t>2026/4/10</a:t>
+              <a:t>2026/5/8</a:t>
             </a:fld>
             <a:endParaRPr lang="zh-TW" altLang="en-US"/>
           </a:p>
@@ -1829,7 +1832,7 @@
           <a:p>
             <a:fld id="{BB564CA7-0CEF-499B-B9E9-84DBEC3A2B3C}" type="datetimeFigureOut">
               <a:rPr lang="zh-TW" altLang="en-US" smtClean="0"/>
-              <a:t>2026/4/10</a:t>
+              <a:t>2026/5/8</a:t>
             </a:fld>
             <a:endParaRPr lang="zh-TW" altLang="en-US"/>
           </a:p>
@@ -1970,7 +1973,7 @@
           <a:p>
             <a:fld id="{BB564CA7-0CEF-499B-B9E9-84DBEC3A2B3C}" type="datetimeFigureOut">
               <a:rPr lang="zh-TW" altLang="en-US" smtClean="0"/>
-              <a:t>2026/4/10</a:t>
+              <a:t>2026/5/8</a:t>
             </a:fld>
             <a:endParaRPr lang="zh-TW" altLang="en-US"/>
           </a:p>
@@ -2083,7 +2086,7 @@
           <a:p>
             <a:fld id="{BB564CA7-0CEF-499B-B9E9-84DBEC3A2B3C}" type="datetimeFigureOut">
               <a:rPr lang="zh-TW" altLang="en-US" smtClean="0"/>
-              <a:t>2026/4/10</a:t>
+              <a:t>2026/5/8</a:t>
             </a:fld>
             <a:endParaRPr lang="zh-TW" altLang="en-US"/>
           </a:p>
@@ -2394,7 +2397,7 @@
           <a:p>
             <a:fld id="{BB564CA7-0CEF-499B-B9E9-84DBEC3A2B3C}" type="datetimeFigureOut">
               <a:rPr lang="zh-TW" altLang="en-US" smtClean="0"/>
-              <a:t>2026/4/10</a:t>
+              <a:t>2026/5/8</a:t>
             </a:fld>
             <a:endParaRPr lang="zh-TW" altLang="en-US"/>
           </a:p>
@@ -2682,7 +2685,7 @@
           <a:p>
             <a:fld id="{BB564CA7-0CEF-499B-B9E9-84DBEC3A2B3C}" type="datetimeFigureOut">
               <a:rPr lang="zh-TW" altLang="en-US" smtClean="0"/>
-              <a:t>2026/4/10</a:t>
+              <a:t>2026/5/8</a:t>
             </a:fld>
             <a:endParaRPr lang="zh-TW" altLang="en-US"/>
           </a:p>
@@ -2923,7 +2926,7 @@
           <a:p>
             <a:fld id="{BB564CA7-0CEF-499B-B9E9-84DBEC3A2B3C}" type="datetimeFigureOut">
               <a:rPr lang="zh-TW" altLang="en-US" smtClean="0"/>
-              <a:t>2026/4/10</a:t>
+              <a:t>2026/5/8</a:t>
             </a:fld>
             <a:endParaRPr lang="zh-TW" altLang="en-US"/>
           </a:p>
@@ -3418,6 +3421,366 @@
   <p:cSld>
     <p:spTree>
       <p:nvGrpSpPr>
+        <p:cNvPr id="1" name="">
+          <a:extLst>
+            <a:ext uri="{FF2B5EF4-FFF2-40B4-BE49-F238E27FC236}">
+              <a16:creationId xmlns:a16="http://schemas.microsoft.com/office/drawing/2014/main" id="{7DF51C7C-74ED-9E8B-F15B-89B8F090BF58}"/>
+            </a:ext>
+          </a:extLst>
+        </p:cNvPr>
+        <p:cNvGrpSpPr/>
+        <p:nvPr/>
+      </p:nvGrpSpPr>
+      <p:grpSpPr>
+        <a:xfrm>
+          <a:off x="0" y="0"/>
+          <a:ext cx="0" cy="0"/>
+          <a:chOff x="0" y="0"/>
+          <a:chExt cx="0" cy="0"/>
+        </a:xfrm>
+      </p:grpSpPr>
+      <p:sp>
+        <p:nvSpPr>
+          <p:cNvPr id="2" name="標題 1">
+            <a:extLst>
+              <a:ext uri="{FF2B5EF4-FFF2-40B4-BE49-F238E27FC236}">
+                <a16:creationId xmlns:a16="http://schemas.microsoft.com/office/drawing/2014/main" id="{F3CF91AA-510E-AEEC-64ED-31B41221AA38}"/>
+              </a:ext>
+            </a:extLst>
+          </p:cNvPr>
+          <p:cNvSpPr>
+            <a:spLocks noGrp="1"/>
+          </p:cNvSpPr>
+          <p:nvPr>
+            <p:ph type="title"/>
+          </p:nvPr>
+        </p:nvSpPr>
+        <p:spPr>
+          <a:xfrm>
+            <a:off x="838200" y="365125"/>
+            <a:ext cx="10515600" cy="915035"/>
+          </a:xfrm>
+        </p:spPr>
+        <p:txBody>
+          <a:bodyPr/>
+          <a:lstStyle/>
+          <a:p>
+            <a:r>
+              <a:rPr lang="en-US" altLang="zh-TW" dirty="0"/>
+              <a:t>Multi-Head-Attention</a:t>
+            </a:r>
+            <a:endParaRPr lang="zh-TW" altLang="en-US" dirty="0"/>
+          </a:p>
+        </p:txBody>
+      </p:sp>
+      <p:pic>
+        <p:nvPicPr>
+          <p:cNvPr id="7" name="內容版面配置區 6" descr="一張含有 文字, 螢幕擷取畫面, 字型, 數字 的圖片&#10;&#10;AI 產生的內容可能不正確。">
+            <a:extLst>
+              <a:ext uri="{FF2B5EF4-FFF2-40B4-BE49-F238E27FC236}">
+                <a16:creationId xmlns:a16="http://schemas.microsoft.com/office/drawing/2014/main" id="{8EF0B271-A6CC-D24B-675D-344E64D6B4C8}"/>
+              </a:ext>
+            </a:extLst>
+          </p:cNvPr>
+          <p:cNvPicPr>
+            <a:picLocks noGrp="1" noChangeAspect="1"/>
+          </p:cNvPicPr>
+          <p:nvPr>
+            <p:ph idx="1"/>
+          </p:nvPr>
+        </p:nvPicPr>
+        <p:blipFill>
+          <a:blip r:embed="rId2">
+            <a:extLst>
+              <a:ext uri="{28A0092B-C50C-407E-A947-70E740481C1C}">
+                <a14:useLocalDpi xmlns:a14="http://schemas.microsoft.com/office/drawing/2010/main" val="0"/>
+              </a:ext>
+            </a:extLst>
+          </a:blip>
+          <a:stretch>
+            <a:fillRect/>
+          </a:stretch>
+        </p:blipFill>
+        <p:spPr>
+          <a:xfrm>
+            <a:off x="1856736" y="1280160"/>
+            <a:ext cx="8478528" cy="5432980"/>
+          </a:xfrm>
+        </p:spPr>
+      </p:pic>
+    </p:spTree>
+    <p:extLst>
+      <p:ext uri="{BB962C8B-B14F-4D97-AF65-F5344CB8AC3E}">
+        <p14:creationId xmlns:p14="http://schemas.microsoft.com/office/powerpoint/2010/main" val="2574989656"/>
+      </p:ext>
+    </p:extLst>
+  </p:cSld>
+  <p:clrMapOvr>
+    <a:masterClrMapping/>
+  </p:clrMapOvr>
+</p:sld>
+</file>
+
+<file path=ppt/slides/slide11.xml><?xml version="1.0" encoding="utf-8"?>
+<p:sld xmlns:a="http://schemas.openxmlformats.org/drawingml/2006/main" xmlns:r="http://schemas.openxmlformats.org/officeDocument/2006/relationships" xmlns:p="http://schemas.openxmlformats.org/presentationml/2006/main">
+  <p:cSld>
+    <p:bg>
+      <p:bgPr>
+        <a:solidFill>
+          <a:schemeClr val="bg1"/>
+        </a:solidFill>
+        <a:effectLst/>
+      </p:bgPr>
+    </p:bg>
+    <p:spTree>
+      <p:nvGrpSpPr>
+        <p:cNvPr id="1" name="">
+          <a:extLst>
+            <a:ext uri="{FF2B5EF4-FFF2-40B4-BE49-F238E27FC236}">
+              <a16:creationId xmlns:a16="http://schemas.microsoft.com/office/drawing/2014/main" id="{0873DD8F-1421-6BF4-DE72-54219E97D0E3}"/>
+            </a:ext>
+          </a:extLst>
+        </p:cNvPr>
+        <p:cNvGrpSpPr/>
+        <p:nvPr/>
+      </p:nvGrpSpPr>
+      <p:grpSpPr>
+        <a:xfrm>
+          <a:off x="0" y="0"/>
+          <a:ext cx="0" cy="0"/>
+          <a:chOff x="0" y="0"/>
+          <a:chExt cx="0" cy="0"/>
+        </a:xfrm>
+      </p:grpSpPr>
+      <p:sp useBgFill="1">
+        <p:nvSpPr>
+          <p:cNvPr id="12" name="Rectangle 11">
+            <a:extLst>
+              <a:ext uri="{FF2B5EF4-FFF2-40B4-BE49-F238E27FC236}">
+                <a16:creationId xmlns:a16="http://schemas.microsoft.com/office/drawing/2014/main" id="{EED6C4D6-9E14-24BA-7C0F-6C23D186D659}"/>
+              </a:ext>
+              <a:ext uri="{C183D7F6-B498-43B3-948B-1728B52AA6E4}">
+                <adec:decorative xmlns:adec="http://schemas.microsoft.com/office/drawing/2017/decorative" val="1"/>
+              </a:ext>
+            </a:extLst>
+          </p:cNvPr>
+          <p:cNvSpPr>
+            <a:spLocks noGrp="1" noRot="1" noChangeAspect="1" noMove="1" noResize="1" noEditPoints="1" noAdjustHandles="1" noChangeArrowheads="1" noChangeShapeType="1" noTextEdit="1"/>
+          </p:cNvSpPr>
+          <p:nvPr>
+            <p:extLst>
+              <p:ext uri="{386F3935-93C4-4BCD-93E2-E3B085C9AB24}">
+                <p16:designElem xmlns:p16="http://schemas.microsoft.com/office/powerpoint/2015/main" val="1"/>
+              </p:ext>
+            </p:extLst>
+          </p:nvPr>
+        </p:nvSpPr>
+        <p:spPr>
+          <a:xfrm>
+            <a:off x="-1" y="0"/>
+            <a:ext cx="12188952" cy="6858000"/>
+          </a:xfrm>
+          <a:prstGeom prst="rect">
+            <a:avLst/>
+          </a:prstGeom>
+          <a:ln>
+            <a:noFill/>
+          </a:ln>
+        </p:spPr>
+        <p:style>
+          <a:lnRef idx="2">
+            <a:schemeClr val="accent1">
+              <a:shade val="50000"/>
+            </a:schemeClr>
+          </a:lnRef>
+          <a:fillRef idx="1">
+            <a:schemeClr val="accent1"/>
+          </a:fillRef>
+          <a:effectRef idx="0">
+            <a:schemeClr val="accent1"/>
+          </a:effectRef>
+          <a:fontRef idx="minor">
+            <a:schemeClr val="lt1"/>
+          </a:fontRef>
+        </p:style>
+        <p:txBody>
+          <a:bodyPr rtlCol="0" anchor="ctr"/>
+          <a:lstStyle/>
+          <a:p>
+            <a:pPr algn="ctr"/>
+            <a:endParaRPr lang="en-US"/>
+          </a:p>
+        </p:txBody>
+      </p:sp>
+      <p:sp>
+        <p:nvSpPr>
+          <p:cNvPr id="2" name="標題 1">
+            <a:extLst>
+              <a:ext uri="{FF2B5EF4-FFF2-40B4-BE49-F238E27FC236}">
+                <a16:creationId xmlns:a16="http://schemas.microsoft.com/office/drawing/2014/main" id="{9629DF36-8F37-2AD1-18A0-49B0346DB143}"/>
+              </a:ext>
+            </a:extLst>
+          </p:cNvPr>
+          <p:cNvSpPr>
+            <a:spLocks noGrp="1"/>
+          </p:cNvSpPr>
+          <p:nvPr>
+            <p:ph type="title"/>
+          </p:nvPr>
+        </p:nvSpPr>
+        <p:spPr>
+          <a:xfrm>
+            <a:off x="836679" y="723898"/>
+            <a:ext cx="6002110" cy="1495425"/>
+          </a:xfrm>
+        </p:spPr>
+        <p:txBody>
+          <a:bodyPr>
+            <a:normAutofit/>
+          </a:bodyPr>
+          <a:lstStyle/>
+          <a:p>
+            <a:r>
+              <a:rPr lang="en-US" altLang="zh-TW" sz="4000" dirty="0"/>
+              <a:t>Transformer</a:t>
+            </a:r>
+            <a:r>
+              <a:rPr lang="zh-TW" altLang="en-US" sz="4000" dirty="0">
+                <a:latin typeface="微軟正黑體" panose="020B0604030504040204" pitchFamily="34" charset="-120"/>
+                <a:ea typeface="微軟正黑體" panose="020B0604030504040204" pitchFamily="34" charset="-120"/>
+              </a:rPr>
+              <a:t>零件</a:t>
+            </a:r>
+          </a:p>
+        </p:txBody>
+      </p:sp>
+      <p:sp>
+        <p:nvSpPr>
+          <p:cNvPr id="29" name="Content Placeholder 8">
+            <a:extLst>
+              <a:ext uri="{FF2B5EF4-FFF2-40B4-BE49-F238E27FC236}">
+                <a16:creationId xmlns:a16="http://schemas.microsoft.com/office/drawing/2014/main" id="{B3E78479-990B-C480-904E-CC910839CD3C}"/>
+              </a:ext>
+            </a:extLst>
+          </p:cNvPr>
+          <p:cNvSpPr>
+            <a:spLocks noGrp="1"/>
+          </p:cNvSpPr>
+          <p:nvPr>
+            <p:ph idx="1"/>
+          </p:nvPr>
+        </p:nvSpPr>
+        <p:spPr>
+          <a:xfrm>
+            <a:off x="836680" y="2405067"/>
+            <a:ext cx="6002110" cy="3729034"/>
+          </a:xfrm>
+        </p:spPr>
+        <p:txBody>
+          <a:bodyPr>
+            <a:normAutofit/>
+          </a:bodyPr>
+          <a:lstStyle/>
+          <a:p>
+            <a:r>
+              <a:rPr lang="en-US" altLang="zh-TW" sz="2000" dirty="0"/>
+              <a:t>Positional Encoding</a:t>
+            </a:r>
+          </a:p>
+          <a:p>
+            <a:endParaRPr lang="en-US" sz="2000" dirty="0"/>
+          </a:p>
+          <a:p>
+            <a:r>
+              <a:rPr lang="en-US" sz="2000" dirty="0"/>
+              <a:t>Multi-Head Attention</a:t>
+            </a:r>
+          </a:p>
+          <a:p>
+            <a:endParaRPr lang="en-US" sz="2000" dirty="0"/>
+          </a:p>
+          <a:p>
+            <a:r>
+              <a:rPr lang="en-US" sz="2000" dirty="0"/>
+              <a:t>Normalization</a:t>
+            </a:r>
+          </a:p>
+          <a:p>
+            <a:endParaRPr lang="en-US" sz="2000" dirty="0"/>
+          </a:p>
+          <a:p>
+            <a:r>
+              <a:rPr lang="en-US" sz="2000" dirty="0"/>
+              <a:t>Residual Network</a:t>
+            </a:r>
+          </a:p>
+          <a:p>
+            <a:endParaRPr lang="en-US" sz="2000" dirty="0"/>
+          </a:p>
+          <a:p>
+            <a:r>
+              <a:rPr lang="en-US" sz="2000" dirty="0"/>
+              <a:t>Feed Forward</a:t>
+            </a:r>
+          </a:p>
+        </p:txBody>
+      </p:sp>
+      <p:pic>
+        <p:nvPicPr>
+          <p:cNvPr id="5" name="內容版面配置區 4" descr="一張含有 文字, 圖表, 螢幕擷取畫面, 字型 的圖片&#10;&#10;AI 產生的內容可能不正確。">
+            <a:extLst>
+              <a:ext uri="{FF2B5EF4-FFF2-40B4-BE49-F238E27FC236}">
+                <a16:creationId xmlns:a16="http://schemas.microsoft.com/office/drawing/2014/main" id="{91B77F39-D791-921C-3564-10C9B9C86B78}"/>
+              </a:ext>
+            </a:extLst>
+          </p:cNvPr>
+          <p:cNvPicPr>
+            <a:picLocks noChangeAspect="1"/>
+          </p:cNvPicPr>
+          <p:nvPr/>
+        </p:nvPicPr>
+        <p:blipFill>
+          <a:blip r:embed="rId2">
+            <a:extLst>
+              <a:ext uri="{28A0092B-C50C-407E-A947-70E740481C1C}">
+                <a14:useLocalDpi xmlns:a14="http://schemas.microsoft.com/office/drawing/2010/main" val="0"/>
+              </a:ext>
+            </a:extLst>
+          </a:blip>
+          <a:srcRect t="1098" r="-2" b="-2"/>
+          <a:stretch>
+            <a:fillRect/>
+          </a:stretch>
+        </p:blipFill>
+        <p:spPr>
+          <a:xfrm>
+            <a:off x="7199440" y="10"/>
+            <a:ext cx="4992560" cy="6857990"/>
+          </a:xfrm>
+          <a:prstGeom prst="rect">
+            <a:avLst/>
+          </a:prstGeom>
+          <a:effectLst/>
+        </p:spPr>
+      </p:pic>
+    </p:spTree>
+    <p:extLst>
+      <p:ext uri="{BB962C8B-B14F-4D97-AF65-F5344CB8AC3E}">
+        <p14:creationId xmlns:p14="http://schemas.microsoft.com/office/powerpoint/2010/main" val="1333680615"/>
+      </p:ext>
+    </p:extLst>
+  </p:cSld>
+  <p:clrMapOvr>
+    <a:masterClrMapping/>
+  </p:clrMapOvr>
+</p:sld>
+</file>
+
+<file path=ppt/slides/slide12.xml><?xml version="1.0" encoding="utf-8"?>
+<p:sld xmlns:a="http://schemas.openxmlformats.org/drawingml/2006/main" xmlns:r="http://schemas.openxmlformats.org/officeDocument/2006/relationships" xmlns:p="http://schemas.openxmlformats.org/presentationml/2006/main">
+  <p:cSld>
+    <p:spTree>
+      <p:nvGrpSpPr>
         <p:cNvPr id="1" name=""/>
         <p:cNvGrpSpPr/>
         <p:nvPr/>
@@ -3472,12 +3835,351 @@
           </a:p>
         </p:txBody>
       </p:sp>
+      <mc:AlternateContent xmlns:mc="http://schemas.openxmlformats.org/markup-compatibility/2006">
+        <mc:Choice xmlns:a14="http://schemas.microsoft.com/office/drawing/2010/main" Requires="a14">
+          <p:sp>
+            <p:nvSpPr>
+              <p:cNvPr id="6" name="文字方塊 5">
+                <a:extLst>
+                  <a:ext uri="{FF2B5EF4-FFF2-40B4-BE49-F238E27FC236}">
+                    <a16:creationId xmlns:a16="http://schemas.microsoft.com/office/drawing/2014/main" id="{C4209C1F-7299-4C35-8503-B7D9BA8E5B4F}"/>
+                  </a:ext>
+                </a:extLst>
+              </p:cNvPr>
+              <p:cNvSpPr txBox="1"/>
+              <p:nvPr/>
+            </p:nvSpPr>
+            <p:spPr>
+              <a:xfrm>
+                <a:off x="1112308" y="2727397"/>
+                <a:ext cx="9967383" cy="1403205"/>
+              </a:xfrm>
+              <a:prstGeom prst="rect">
+                <a:avLst/>
+              </a:prstGeom>
+              <a:noFill/>
+            </p:spPr>
+            <p:txBody>
+              <a:bodyPr wrap="square" lIns="0" tIns="0" rIns="0" bIns="0" rtlCol="0">
+                <a:spAutoFit/>
+              </a:bodyPr>
+              <a:lstStyle/>
+              <a:p>
+                <a14:m>
+                  <m:oMathPara xmlns:m="http://schemas.openxmlformats.org/officeDocument/2006/math">
+                    <m:oMathParaPr>
+                      <m:jc m:val="centerGroup"/>
+                    </m:oMathParaPr>
+                    <m:oMath xmlns:m="http://schemas.openxmlformats.org/officeDocument/2006/math">
+                      <m:r>
+                        <a:rPr lang="en-US" altLang="zh-TW" sz="4800" b="0" i="1" smtClean="0">
+                          <a:latin typeface="Cambria Math" panose="02040503050406030204" pitchFamily="18" charset="0"/>
+                        </a:rPr>
+                        <m:t>𝐿𝑎𝑦𝑒𝑟𝑁𝑜𝑟𝑚</m:t>
+                      </m:r>
+                      <m:d>
+                        <m:dPr>
+                          <m:ctrlPr>
+                            <a:rPr lang="en-US" altLang="zh-TW" sz="4800" b="0" i="1" smtClean="0">
+                              <a:latin typeface="Cambria Math" panose="02040503050406030204" pitchFamily="18" charset="0"/>
+                            </a:rPr>
+                          </m:ctrlPr>
+                        </m:dPr>
+                        <m:e>
+                          <m:sSub>
+                            <m:sSubPr>
+                              <m:ctrlPr>
+                                <a:rPr lang="en-US" altLang="zh-TW" sz="4800" b="0" i="1" smtClean="0">
+                                  <a:latin typeface="Cambria Math" panose="02040503050406030204" pitchFamily="18" charset="0"/>
+                                </a:rPr>
+                              </m:ctrlPr>
+                            </m:sSubPr>
+                            <m:e>
+                              <m:r>
+                                <a:rPr lang="en-US" altLang="zh-TW" sz="4800" b="0" i="1" smtClean="0">
+                                  <a:latin typeface="Cambria Math" panose="02040503050406030204" pitchFamily="18" charset="0"/>
+                                </a:rPr>
+                                <m:t>𝑥</m:t>
+                              </m:r>
+                            </m:e>
+                            <m:sub>
+                              <m:r>
+                                <a:rPr lang="en-US" altLang="zh-TW" sz="4800" b="0" i="1" smtClean="0">
+                                  <a:latin typeface="Cambria Math" panose="02040503050406030204" pitchFamily="18" charset="0"/>
+                                </a:rPr>
+                                <m:t>𝑖</m:t>
+                              </m:r>
+                            </m:sub>
+                          </m:sSub>
+                        </m:e>
+                      </m:d>
+                      <m:r>
+                        <a:rPr lang="en-US" altLang="zh-TW" sz="4800" i="1" smtClean="0">
+                          <a:latin typeface="Cambria Math" panose="02040503050406030204" pitchFamily="18" charset="0"/>
+                        </a:rPr>
+                        <m:t>=</m:t>
+                      </m:r>
+                      <m:r>
+                        <a:rPr lang="zh-TW" altLang="en-US" sz="4800" i="1" smtClean="0">
+                          <a:latin typeface="Cambria Math" panose="02040503050406030204" pitchFamily="18" charset="0"/>
+                        </a:rPr>
+                        <m:t>𝛾</m:t>
+                      </m:r>
+                      <m:r>
+                        <a:rPr lang="en-US" altLang="zh-TW" sz="4800" b="0" i="1" smtClean="0">
+                          <a:latin typeface="Cambria Math" panose="02040503050406030204" pitchFamily="18" charset="0"/>
+                        </a:rPr>
+                        <m:t> ∗</m:t>
+                      </m:r>
+                      <m:f>
+                        <m:fPr>
+                          <m:ctrlPr>
+                            <a:rPr lang="en-US" altLang="zh-TW" sz="4800" i="1" smtClean="0">
+                              <a:latin typeface="Cambria Math" panose="02040503050406030204" pitchFamily="18" charset="0"/>
+                            </a:rPr>
+                          </m:ctrlPr>
+                        </m:fPr>
+                        <m:num>
+                          <m:sSub>
+                            <m:sSubPr>
+                              <m:ctrlPr>
+                                <a:rPr lang="en-US" altLang="zh-TW" sz="4800" i="1" smtClean="0">
+                                  <a:latin typeface="Cambria Math" panose="02040503050406030204" pitchFamily="18" charset="0"/>
+                                </a:rPr>
+                              </m:ctrlPr>
+                            </m:sSubPr>
+                            <m:e>
+                              <m:r>
+                                <a:rPr lang="en-US" altLang="zh-TW" sz="4800" b="0" i="1" smtClean="0">
+                                  <a:latin typeface="Cambria Math" panose="02040503050406030204" pitchFamily="18" charset="0"/>
+                                </a:rPr>
+                                <m:t>𝑥</m:t>
+                              </m:r>
+                            </m:e>
+                            <m:sub>
+                              <m:r>
+                                <a:rPr lang="en-US" altLang="zh-TW" sz="4800" b="0" i="1" smtClean="0">
+                                  <a:latin typeface="Cambria Math" panose="02040503050406030204" pitchFamily="18" charset="0"/>
+                                </a:rPr>
+                                <m:t>𝑖</m:t>
+                              </m:r>
+                            </m:sub>
+                          </m:sSub>
+                          <m:r>
+                            <a:rPr lang="en-US" altLang="zh-TW" sz="4800" b="0" i="1" smtClean="0">
+                              <a:latin typeface="Cambria Math" panose="02040503050406030204" pitchFamily="18" charset="0"/>
+                            </a:rPr>
+                            <m:t> − </m:t>
+                          </m:r>
+                          <m:r>
+                            <a:rPr lang="zh-TW" altLang="en-US" sz="4800" b="0" i="1" smtClean="0">
+                              <a:latin typeface="Cambria Math" panose="02040503050406030204" pitchFamily="18" charset="0"/>
+                            </a:rPr>
+                            <m:t>𝜇</m:t>
+                          </m:r>
+                        </m:num>
+                        <m:den>
+                          <m:rad>
+                            <m:radPr>
+                              <m:degHide m:val="on"/>
+                              <m:ctrlPr>
+                                <a:rPr lang="en-US" altLang="zh-TW" sz="4800" i="1" smtClean="0">
+                                  <a:latin typeface="Cambria Math" panose="02040503050406030204" pitchFamily="18" charset="0"/>
+                                </a:rPr>
+                              </m:ctrlPr>
+                            </m:radPr>
+                            <m:deg/>
+                            <m:e>
+                              <m:sSup>
+                                <m:sSupPr>
+                                  <m:ctrlPr>
+                                    <a:rPr lang="en-US" altLang="zh-TW" sz="4800" i="1" smtClean="0">
+                                      <a:latin typeface="Cambria Math" panose="02040503050406030204" pitchFamily="18" charset="0"/>
+                                    </a:rPr>
+                                  </m:ctrlPr>
+                                </m:sSupPr>
+                                <m:e>
+                                  <m:r>
+                                    <a:rPr lang="zh-TW" altLang="en-US" sz="4800" i="1" smtClean="0">
+                                      <a:latin typeface="Cambria Math" panose="02040503050406030204" pitchFamily="18" charset="0"/>
+                                    </a:rPr>
+                                    <m:t>𝜎</m:t>
+                                  </m:r>
+                                </m:e>
+                                <m:sup>
+                                  <m:r>
+                                    <a:rPr lang="en-US" altLang="zh-TW" sz="4800" b="0" i="1" smtClean="0">
+                                      <a:latin typeface="Cambria Math" panose="02040503050406030204" pitchFamily="18" charset="0"/>
+                                    </a:rPr>
+                                    <m:t>2</m:t>
+                                  </m:r>
+                                </m:sup>
+                              </m:sSup>
+                              <m:r>
+                                <a:rPr lang="en-US" altLang="zh-TW" sz="4800" b="0" i="1" smtClean="0">
+                                  <a:latin typeface="Cambria Math" panose="02040503050406030204" pitchFamily="18" charset="0"/>
+                                </a:rPr>
+                                <m:t>+ </m:t>
+                              </m:r>
+                              <m:r>
+                                <a:rPr lang="zh-TW" altLang="en-US" sz="4800" b="0" i="1" smtClean="0">
+                                  <a:latin typeface="Cambria Math" panose="02040503050406030204" pitchFamily="18" charset="0"/>
+                                </a:rPr>
+                                <m:t>𝜖</m:t>
+                              </m:r>
+                            </m:e>
+                          </m:rad>
+                        </m:den>
+                      </m:f>
+                      <m:r>
+                        <a:rPr lang="en-US" altLang="zh-TW" sz="4800" b="0" i="1" smtClean="0">
+                          <a:latin typeface="Cambria Math" panose="02040503050406030204" pitchFamily="18" charset="0"/>
+                        </a:rPr>
+                        <m:t>+ </m:t>
+                      </m:r>
+                      <m:r>
+                        <a:rPr lang="zh-TW" altLang="en-US" sz="4800" b="0" i="1" smtClean="0">
+                          <a:latin typeface="Cambria Math" panose="02040503050406030204" pitchFamily="18" charset="0"/>
+                        </a:rPr>
+                        <m:t>𝛽</m:t>
+                      </m:r>
+                    </m:oMath>
+                  </m:oMathPara>
+                </a14:m>
+                <a:endParaRPr lang="zh-TW" altLang="en-US" sz="4800" dirty="0"/>
+              </a:p>
+            </p:txBody>
+          </p:sp>
+        </mc:Choice>
+        <mc:Fallback>
+          <p:sp>
+            <p:nvSpPr>
+              <p:cNvPr id="6" name="文字方塊 5">
+                <a:extLst>
+                  <a:ext uri="{FF2B5EF4-FFF2-40B4-BE49-F238E27FC236}">
+                    <a16:creationId xmlns:a16="http://schemas.microsoft.com/office/drawing/2014/main" id="{C4209C1F-7299-4C35-8503-B7D9BA8E5B4F}"/>
+                  </a:ext>
+                </a:extLst>
+              </p:cNvPr>
+              <p:cNvSpPr txBox="1">
+                <a:spLocks noRot="1" noChangeAspect="1" noMove="1" noResize="1" noEditPoints="1" noAdjustHandles="1" noChangeArrowheads="1" noChangeShapeType="1" noTextEdit="1"/>
+              </p:cNvSpPr>
+              <p:nvPr/>
+            </p:nvSpPr>
+            <p:spPr>
+              <a:xfrm>
+                <a:off x="1112308" y="2727397"/>
+                <a:ext cx="9967383" cy="1403205"/>
+              </a:xfrm>
+              <a:prstGeom prst="rect">
+                <a:avLst/>
+              </a:prstGeom>
+              <a:blipFill>
+                <a:blip r:embed="rId2"/>
+                <a:stretch>
+                  <a:fillRect/>
+                </a:stretch>
+              </a:blipFill>
+            </p:spPr>
+            <p:txBody>
+              <a:bodyPr/>
+              <a:lstStyle/>
+              <a:p>
+                <a:r>
+                  <a:rPr lang="zh-TW" altLang="en-US">
+                    <a:noFill/>
+                  </a:rPr>
+                  <a:t> </a:t>
+                </a:r>
+              </a:p>
+            </p:txBody>
+          </p:sp>
+        </mc:Fallback>
+      </mc:AlternateContent>
+    </p:spTree>
+    <p:extLst>
+      <p:ext uri="{BB962C8B-B14F-4D97-AF65-F5344CB8AC3E}">
+        <p14:creationId xmlns:p14="http://schemas.microsoft.com/office/powerpoint/2010/main" val="1492025818"/>
+      </p:ext>
+    </p:extLst>
+  </p:cSld>
+  <p:clrMapOvr>
+    <a:masterClrMapping/>
+  </p:clrMapOvr>
+</p:sld>
+</file>
+
+<file path=ppt/slides/slide13.xml><?xml version="1.0" encoding="utf-8"?>
+<p:sld xmlns:a="http://schemas.openxmlformats.org/drawingml/2006/main" xmlns:r="http://schemas.openxmlformats.org/officeDocument/2006/relationships" xmlns:p="http://schemas.openxmlformats.org/presentationml/2006/main">
+  <p:cSld>
+    <p:spTree>
+      <p:nvGrpSpPr>
+        <p:cNvPr id="1" name="">
+          <a:extLst>
+            <a:ext uri="{FF2B5EF4-FFF2-40B4-BE49-F238E27FC236}">
+              <a16:creationId xmlns:a16="http://schemas.microsoft.com/office/drawing/2014/main" id="{23471E1E-7CCE-B347-3AD2-3E9C711E7ED9}"/>
+            </a:ext>
+          </a:extLst>
+        </p:cNvPr>
+        <p:cNvGrpSpPr/>
+        <p:nvPr/>
+      </p:nvGrpSpPr>
+      <p:grpSpPr>
+        <a:xfrm>
+          <a:off x="0" y="0"/>
+          <a:ext cx="0" cy="0"/>
+          <a:chOff x="0" y="0"/>
+          <a:chExt cx="0" cy="0"/>
+        </a:xfrm>
+      </p:grpSpPr>
+      <p:sp>
+        <p:nvSpPr>
+          <p:cNvPr id="2" name="標題 1">
+            <a:extLst>
+              <a:ext uri="{FF2B5EF4-FFF2-40B4-BE49-F238E27FC236}">
+                <a16:creationId xmlns:a16="http://schemas.microsoft.com/office/drawing/2014/main" id="{B527A8BE-9060-2BFA-E6BD-01BD44BD12D3}"/>
+              </a:ext>
+            </a:extLst>
+          </p:cNvPr>
+          <p:cNvSpPr>
+            <a:spLocks noGrp="1"/>
+          </p:cNvSpPr>
+          <p:nvPr>
+            <p:ph type="title"/>
+          </p:nvPr>
+        </p:nvSpPr>
+        <p:spPr/>
+        <p:txBody>
+          <a:bodyPr/>
+          <a:lstStyle/>
+          <a:p>
+            <a:r>
+              <a:rPr lang="zh-TW" altLang="en-US" dirty="0">
+                <a:latin typeface="微軟正黑體" panose="020B0604030504040204" pitchFamily="34" charset="-120"/>
+                <a:ea typeface="微軟正黑體" panose="020B0604030504040204" pitchFamily="34" charset="-120"/>
+              </a:rPr>
+              <a:t>標準化</a:t>
+            </a:r>
+            <a:r>
+              <a:rPr lang="en-US" altLang="zh-TW" dirty="0">
+                <a:latin typeface="微軟正黑體" panose="020B0604030504040204" pitchFamily="34" charset="-120"/>
+                <a:ea typeface="微軟正黑體" panose="020B0604030504040204" pitchFamily="34" charset="-120"/>
+              </a:rPr>
+              <a:t>(Normalization)</a:t>
+            </a:r>
+            <a:endParaRPr lang="zh-TW" altLang="en-US" dirty="0">
+              <a:latin typeface="微軟正黑體" panose="020B0604030504040204" pitchFamily="34" charset="-120"/>
+              <a:ea typeface="微軟正黑體" panose="020B0604030504040204" pitchFamily="34" charset="-120"/>
+            </a:endParaRPr>
+          </a:p>
+        </p:txBody>
+      </p:sp>
       <p:sp>
         <p:nvSpPr>
           <p:cNvPr id="3" name="內容版面配置區 2">
             <a:extLst>
               <a:ext uri="{FF2B5EF4-FFF2-40B4-BE49-F238E27FC236}">
-                <a16:creationId xmlns:a16="http://schemas.microsoft.com/office/drawing/2014/main" id="{ACF9283B-92DD-A832-BA92-DC85CBBD4661}"/>
+                <a16:creationId xmlns:a16="http://schemas.microsoft.com/office/drawing/2014/main" id="{CA686382-A7D6-0097-88DC-6E0E267A8603}"/>
               </a:ext>
             </a:extLst>
           </p:cNvPr>
@@ -3574,7 +4276,7 @@
     </p:spTree>
     <p:extLst>
       <p:ext uri="{BB962C8B-B14F-4D97-AF65-F5344CB8AC3E}">
-        <p14:creationId xmlns:p14="http://schemas.microsoft.com/office/powerpoint/2010/main" val="1492025818"/>
+        <p14:creationId xmlns:p14="http://schemas.microsoft.com/office/powerpoint/2010/main" val="2564376161"/>
       </p:ext>
     </p:extLst>
   </p:cSld>
@@ -3584,7 +4286,7 @@
 </p:sld>
 </file>
 
-<file path=ppt/slides/slide11.xml><?xml version="1.0" encoding="utf-8"?>
+<file path=ppt/slides/slide14.xml><?xml version="1.0" encoding="utf-8"?>
 <p:sld xmlns:a="http://schemas.openxmlformats.org/drawingml/2006/main" xmlns:r="http://schemas.openxmlformats.org/officeDocument/2006/relationships" xmlns:p="http://schemas.openxmlformats.org/presentationml/2006/main">
   <p:cSld>
     <p:bg>
@@ -4224,7 +4926,7 @@
 </p:sld>
 </file>
 
-<file path=ppt/slides/slide12.xml><?xml version="1.0" encoding="utf-8"?>
+<file path=ppt/slides/slide15.xml><?xml version="1.0" encoding="utf-8"?>
 <p:sld xmlns:a="http://schemas.openxmlformats.org/drawingml/2006/main" xmlns:r="http://schemas.openxmlformats.org/officeDocument/2006/relationships" xmlns:p="http://schemas.openxmlformats.org/presentationml/2006/main">
   <p:cSld>
     <p:bg>
@@ -4656,7 +5358,7 @@
 </p:sld>
 </file>
 
-<file path=ppt/slides/slide13.xml><?xml version="1.0" encoding="utf-8"?>
+<file path=ppt/slides/slide16.xml><?xml version="1.0" encoding="utf-8"?>
 <p:sld xmlns:a="http://schemas.openxmlformats.org/drawingml/2006/main" xmlns:r="http://schemas.openxmlformats.org/officeDocument/2006/relationships" xmlns:p="http://schemas.openxmlformats.org/presentationml/2006/main">
   <p:cSld>
     <p:bg>
@@ -17314,7 +18016,7 @@
 </p:sld>
 </file>
 
-<file path=ppt/slides/slide14.xml><?xml version="1.0" encoding="utf-8"?>
+<file path=ppt/slides/slide17.xml><?xml version="1.0" encoding="utf-8"?>
 <p:sld xmlns:a="http://schemas.openxmlformats.org/drawingml/2006/main" xmlns:r="http://schemas.openxmlformats.org/officeDocument/2006/relationships" xmlns:p="http://schemas.openxmlformats.org/presentationml/2006/main">
   <p:cSld>
     <p:spTree>
@@ -17452,7 +18154,7 @@
 </p:sld>
 </file>
 
-<file path=ppt/slides/slide15.xml><?xml version="1.0" encoding="utf-8"?>
+<file path=ppt/slides/slide18.xml><?xml version="1.0" encoding="utf-8"?>
 <p:sld xmlns:a="http://schemas.openxmlformats.org/drawingml/2006/main" xmlns:r="http://schemas.openxmlformats.org/officeDocument/2006/relationships" xmlns:p="http://schemas.openxmlformats.org/presentationml/2006/main">
   <p:cSld>
     <p:spTree>
@@ -21552,6 +22254,261 @@
 <file path=ppt/slides/slide6.xml><?xml version="1.0" encoding="utf-8"?>
 <p:sld xmlns:a="http://schemas.openxmlformats.org/drawingml/2006/main" xmlns:r="http://schemas.openxmlformats.org/officeDocument/2006/relationships" xmlns:p="http://schemas.openxmlformats.org/presentationml/2006/main">
   <p:cSld>
+    <p:bg>
+      <p:bgPr>
+        <a:solidFill>
+          <a:schemeClr val="bg1"/>
+        </a:solidFill>
+        <a:effectLst/>
+      </p:bgPr>
+    </p:bg>
+    <p:spTree>
+      <p:nvGrpSpPr>
+        <p:cNvPr id="1" name="">
+          <a:extLst>
+            <a:ext uri="{FF2B5EF4-FFF2-40B4-BE49-F238E27FC236}">
+              <a16:creationId xmlns:a16="http://schemas.microsoft.com/office/drawing/2014/main" id="{08725AA8-44B4-2A20-4B35-32EF037C5C75}"/>
+            </a:ext>
+          </a:extLst>
+        </p:cNvPr>
+        <p:cNvGrpSpPr/>
+        <p:nvPr/>
+      </p:nvGrpSpPr>
+      <p:grpSpPr>
+        <a:xfrm>
+          <a:off x="0" y="0"/>
+          <a:ext cx="0" cy="0"/>
+          <a:chOff x="0" y="0"/>
+          <a:chExt cx="0" cy="0"/>
+        </a:xfrm>
+      </p:grpSpPr>
+      <p:sp useBgFill="1">
+        <p:nvSpPr>
+          <p:cNvPr id="12" name="Rectangle 11">
+            <a:extLst>
+              <a:ext uri="{FF2B5EF4-FFF2-40B4-BE49-F238E27FC236}">
+                <a16:creationId xmlns:a16="http://schemas.microsoft.com/office/drawing/2014/main" id="{F2846D7D-1930-77BB-86D3-AE415A22F4FB}"/>
+              </a:ext>
+              <a:ext uri="{C183D7F6-B498-43B3-948B-1728B52AA6E4}">
+                <adec:decorative xmlns:adec="http://schemas.microsoft.com/office/drawing/2017/decorative" val="1"/>
+              </a:ext>
+            </a:extLst>
+          </p:cNvPr>
+          <p:cNvSpPr>
+            <a:spLocks noGrp="1" noRot="1" noChangeAspect="1" noMove="1" noResize="1" noEditPoints="1" noAdjustHandles="1" noChangeArrowheads="1" noChangeShapeType="1" noTextEdit="1"/>
+          </p:cNvSpPr>
+          <p:nvPr>
+            <p:extLst>
+              <p:ext uri="{386F3935-93C4-4BCD-93E2-E3B085C9AB24}">
+                <p16:designElem xmlns:p16="http://schemas.microsoft.com/office/powerpoint/2015/main" val="1"/>
+              </p:ext>
+            </p:extLst>
+          </p:nvPr>
+        </p:nvSpPr>
+        <p:spPr>
+          <a:xfrm>
+            <a:off x="-1" y="0"/>
+            <a:ext cx="12188952" cy="6858000"/>
+          </a:xfrm>
+          <a:prstGeom prst="rect">
+            <a:avLst/>
+          </a:prstGeom>
+          <a:ln>
+            <a:noFill/>
+          </a:ln>
+        </p:spPr>
+        <p:style>
+          <a:lnRef idx="2">
+            <a:schemeClr val="accent1">
+              <a:shade val="50000"/>
+            </a:schemeClr>
+          </a:lnRef>
+          <a:fillRef idx="1">
+            <a:schemeClr val="accent1"/>
+          </a:fillRef>
+          <a:effectRef idx="0">
+            <a:schemeClr val="accent1"/>
+          </a:effectRef>
+          <a:fontRef idx="minor">
+            <a:schemeClr val="lt1"/>
+          </a:fontRef>
+        </p:style>
+        <p:txBody>
+          <a:bodyPr rtlCol="0" anchor="ctr"/>
+          <a:lstStyle/>
+          <a:p>
+            <a:pPr algn="ctr"/>
+            <a:endParaRPr lang="en-US"/>
+          </a:p>
+        </p:txBody>
+      </p:sp>
+      <p:sp>
+        <p:nvSpPr>
+          <p:cNvPr id="2" name="標題 1">
+            <a:extLst>
+              <a:ext uri="{FF2B5EF4-FFF2-40B4-BE49-F238E27FC236}">
+                <a16:creationId xmlns:a16="http://schemas.microsoft.com/office/drawing/2014/main" id="{51EED5AA-3DD9-C7C3-69E8-FB36A781C6AD}"/>
+              </a:ext>
+            </a:extLst>
+          </p:cNvPr>
+          <p:cNvSpPr>
+            <a:spLocks noGrp="1"/>
+          </p:cNvSpPr>
+          <p:nvPr>
+            <p:ph type="title"/>
+          </p:nvPr>
+        </p:nvSpPr>
+        <p:spPr>
+          <a:xfrm>
+            <a:off x="836679" y="723898"/>
+            <a:ext cx="6002110" cy="1495425"/>
+          </a:xfrm>
+        </p:spPr>
+        <p:txBody>
+          <a:bodyPr>
+            <a:normAutofit/>
+          </a:bodyPr>
+          <a:lstStyle/>
+          <a:p>
+            <a:r>
+              <a:rPr lang="en-US" altLang="zh-TW" sz="4000" dirty="0"/>
+              <a:t>Transformer</a:t>
+            </a:r>
+            <a:r>
+              <a:rPr lang="zh-TW" altLang="en-US" sz="4000" dirty="0">
+                <a:latin typeface="微軟正黑體" panose="020B0604030504040204" pitchFamily="34" charset="-120"/>
+                <a:ea typeface="微軟正黑體" panose="020B0604030504040204" pitchFamily="34" charset="-120"/>
+              </a:rPr>
+              <a:t>零件</a:t>
+            </a:r>
+          </a:p>
+        </p:txBody>
+      </p:sp>
+      <p:sp>
+        <p:nvSpPr>
+          <p:cNvPr id="29" name="Content Placeholder 8">
+            <a:extLst>
+              <a:ext uri="{FF2B5EF4-FFF2-40B4-BE49-F238E27FC236}">
+                <a16:creationId xmlns:a16="http://schemas.microsoft.com/office/drawing/2014/main" id="{70633ACA-C938-781B-D5DE-0F21FD8B90BB}"/>
+              </a:ext>
+            </a:extLst>
+          </p:cNvPr>
+          <p:cNvSpPr>
+            <a:spLocks noGrp="1"/>
+          </p:cNvSpPr>
+          <p:nvPr>
+            <p:ph idx="1"/>
+          </p:nvPr>
+        </p:nvSpPr>
+        <p:spPr>
+          <a:xfrm>
+            <a:off x="836680" y="2405067"/>
+            <a:ext cx="6002110" cy="3729034"/>
+          </a:xfrm>
+        </p:spPr>
+        <p:txBody>
+          <a:bodyPr>
+            <a:normAutofit/>
+          </a:bodyPr>
+          <a:lstStyle/>
+          <a:p>
+            <a:r>
+              <a:rPr lang="en-US" altLang="zh-TW" sz="2000" dirty="0"/>
+              <a:t>Positional Encoding</a:t>
+            </a:r>
+          </a:p>
+          <a:p>
+            <a:endParaRPr lang="en-US" sz="2000" dirty="0"/>
+          </a:p>
+          <a:p>
+            <a:r>
+              <a:rPr lang="en-US" sz="2000" dirty="0"/>
+              <a:t>Multi-Head Attention</a:t>
+            </a:r>
+          </a:p>
+          <a:p>
+            <a:endParaRPr lang="en-US" sz="2000" dirty="0"/>
+          </a:p>
+          <a:p>
+            <a:r>
+              <a:rPr lang="en-US" sz="2000" dirty="0"/>
+              <a:t>Normalization</a:t>
+            </a:r>
+          </a:p>
+          <a:p>
+            <a:endParaRPr lang="en-US" sz="2000" dirty="0"/>
+          </a:p>
+          <a:p>
+            <a:r>
+              <a:rPr lang="en-US" sz="2000" dirty="0"/>
+              <a:t>Residual Network</a:t>
+            </a:r>
+          </a:p>
+          <a:p>
+            <a:endParaRPr lang="en-US" sz="2000" dirty="0"/>
+          </a:p>
+          <a:p>
+            <a:r>
+              <a:rPr lang="en-US" sz="2000" dirty="0"/>
+              <a:t>Feed Forward</a:t>
+            </a:r>
+          </a:p>
+        </p:txBody>
+      </p:sp>
+      <p:pic>
+        <p:nvPicPr>
+          <p:cNvPr id="5" name="內容版面配置區 4" descr="一張含有 文字, 圖表, 螢幕擷取畫面, 字型 的圖片&#10;&#10;AI 產生的內容可能不正確。">
+            <a:extLst>
+              <a:ext uri="{FF2B5EF4-FFF2-40B4-BE49-F238E27FC236}">
+                <a16:creationId xmlns:a16="http://schemas.microsoft.com/office/drawing/2014/main" id="{E4A9ECFD-90DD-E3D5-07B6-D6E3F4EC98EB}"/>
+              </a:ext>
+            </a:extLst>
+          </p:cNvPr>
+          <p:cNvPicPr>
+            <a:picLocks noChangeAspect="1"/>
+          </p:cNvPicPr>
+          <p:nvPr/>
+        </p:nvPicPr>
+        <p:blipFill>
+          <a:blip r:embed="rId2">
+            <a:extLst>
+              <a:ext uri="{28A0092B-C50C-407E-A947-70E740481C1C}">
+                <a14:useLocalDpi xmlns:a14="http://schemas.microsoft.com/office/drawing/2010/main" val="0"/>
+              </a:ext>
+            </a:extLst>
+          </a:blip>
+          <a:srcRect t="1098" r="-2" b="-2"/>
+          <a:stretch>
+            <a:fillRect/>
+          </a:stretch>
+        </p:blipFill>
+        <p:spPr>
+          <a:xfrm>
+            <a:off x="7199440" y="10"/>
+            <a:ext cx="4992560" cy="6857990"/>
+          </a:xfrm>
+          <a:prstGeom prst="rect">
+            <a:avLst/>
+          </a:prstGeom>
+          <a:effectLst/>
+        </p:spPr>
+      </p:pic>
+    </p:spTree>
+    <p:extLst>
+      <p:ext uri="{BB962C8B-B14F-4D97-AF65-F5344CB8AC3E}">
+        <p14:creationId xmlns:p14="http://schemas.microsoft.com/office/powerpoint/2010/main" val="4017834549"/>
+      </p:ext>
+    </p:extLst>
+  </p:cSld>
+  <p:clrMapOvr>
+    <a:masterClrMapping/>
+  </p:clrMapOvr>
+</p:sld>
+</file>
+
+<file path=ppt/slides/slide7.xml><?xml version="1.0" encoding="utf-8"?>
+<p:sld xmlns:a="http://schemas.openxmlformats.org/drawingml/2006/main" xmlns:r="http://schemas.openxmlformats.org/officeDocument/2006/relationships" xmlns:p="http://schemas.openxmlformats.org/presentationml/2006/main">
+  <p:cSld>
     <p:spTree>
       <p:nvGrpSpPr>
         <p:cNvPr id="1" name="">
@@ -22057,7 +23014,7 @@
 </p:sld>
 </file>
 
-<file path=ppt/slides/slide7.xml><?xml version="1.0" encoding="utf-8"?>
+<file path=ppt/slides/slide8.xml><?xml version="1.0" encoding="utf-8"?>
 <p:sld xmlns:a="http://schemas.openxmlformats.org/drawingml/2006/main" xmlns:r="http://schemas.openxmlformats.org/officeDocument/2006/relationships" xmlns:p="http://schemas.openxmlformats.org/presentationml/2006/main">
   <p:cSld>
     <p:spTree>
@@ -22156,7 +23113,7 @@
 </p:sld>
 </file>
 
-<file path=ppt/slides/slide8.xml><?xml version="1.0" encoding="utf-8"?>
+<file path=ppt/slides/slide9.xml><?xml version="1.0" encoding="utf-8"?>
 <p:sld xmlns:a="http://schemas.openxmlformats.org/drawingml/2006/main" xmlns:r="http://schemas.openxmlformats.org/officeDocument/2006/relationships" xmlns:p="http://schemas.openxmlformats.org/presentationml/2006/main">
   <p:cSld>
     <p:spTree>
@@ -22279,111 +23236,6 @@
     <p:extLst>
       <p:ext uri="{BB962C8B-B14F-4D97-AF65-F5344CB8AC3E}">
         <p14:creationId xmlns:p14="http://schemas.microsoft.com/office/powerpoint/2010/main" val="4030816480"/>
-      </p:ext>
-    </p:extLst>
-  </p:cSld>
-  <p:clrMapOvr>
-    <a:masterClrMapping/>
-  </p:clrMapOvr>
-</p:sld>
-</file>
-
-<file path=ppt/slides/slide9.xml><?xml version="1.0" encoding="utf-8"?>
-<p:sld xmlns:a="http://schemas.openxmlformats.org/drawingml/2006/main" xmlns:r="http://schemas.openxmlformats.org/officeDocument/2006/relationships" xmlns:p="http://schemas.openxmlformats.org/presentationml/2006/main">
-  <p:cSld>
-    <p:spTree>
-      <p:nvGrpSpPr>
-        <p:cNvPr id="1" name="">
-          <a:extLst>
-            <a:ext uri="{FF2B5EF4-FFF2-40B4-BE49-F238E27FC236}">
-              <a16:creationId xmlns:a16="http://schemas.microsoft.com/office/drawing/2014/main" id="{7DF51C7C-74ED-9E8B-F15B-89B8F090BF58}"/>
-            </a:ext>
-          </a:extLst>
-        </p:cNvPr>
-        <p:cNvGrpSpPr/>
-        <p:nvPr/>
-      </p:nvGrpSpPr>
-      <p:grpSpPr>
-        <a:xfrm>
-          <a:off x="0" y="0"/>
-          <a:ext cx="0" cy="0"/>
-          <a:chOff x="0" y="0"/>
-          <a:chExt cx="0" cy="0"/>
-        </a:xfrm>
-      </p:grpSpPr>
-      <p:sp>
-        <p:nvSpPr>
-          <p:cNvPr id="2" name="標題 1">
-            <a:extLst>
-              <a:ext uri="{FF2B5EF4-FFF2-40B4-BE49-F238E27FC236}">
-                <a16:creationId xmlns:a16="http://schemas.microsoft.com/office/drawing/2014/main" id="{F3CF91AA-510E-AEEC-64ED-31B41221AA38}"/>
-              </a:ext>
-            </a:extLst>
-          </p:cNvPr>
-          <p:cNvSpPr>
-            <a:spLocks noGrp="1"/>
-          </p:cNvSpPr>
-          <p:nvPr>
-            <p:ph type="title"/>
-          </p:nvPr>
-        </p:nvSpPr>
-        <p:spPr>
-          <a:xfrm>
-            <a:off x="838200" y="365125"/>
-            <a:ext cx="10515600" cy="915035"/>
-          </a:xfrm>
-        </p:spPr>
-        <p:txBody>
-          <a:bodyPr/>
-          <a:lstStyle/>
-          <a:p>
-            <a:r>
-              <a:rPr lang="en-US" altLang="zh-TW" dirty="0"/>
-              <a:t>Multi-Head-Attention</a:t>
-            </a:r>
-            <a:endParaRPr lang="zh-TW" altLang="en-US" dirty="0"/>
-          </a:p>
-        </p:txBody>
-      </p:sp>
-      <p:pic>
-        <p:nvPicPr>
-          <p:cNvPr id="7" name="內容版面配置區 6" descr="一張含有 文字, 螢幕擷取畫面, 字型, 數字 的圖片&#10;&#10;AI 產生的內容可能不正確。">
-            <a:extLst>
-              <a:ext uri="{FF2B5EF4-FFF2-40B4-BE49-F238E27FC236}">
-                <a16:creationId xmlns:a16="http://schemas.microsoft.com/office/drawing/2014/main" id="{8EF0B271-A6CC-D24B-675D-344E64D6B4C8}"/>
-              </a:ext>
-            </a:extLst>
-          </p:cNvPr>
-          <p:cNvPicPr>
-            <a:picLocks noGrp="1" noChangeAspect="1"/>
-          </p:cNvPicPr>
-          <p:nvPr>
-            <p:ph idx="1"/>
-          </p:nvPr>
-        </p:nvPicPr>
-        <p:blipFill>
-          <a:blip r:embed="rId2">
-            <a:extLst>
-              <a:ext uri="{28A0092B-C50C-407E-A947-70E740481C1C}">
-                <a14:useLocalDpi xmlns:a14="http://schemas.microsoft.com/office/drawing/2010/main" val="0"/>
-              </a:ext>
-            </a:extLst>
-          </a:blip>
-          <a:stretch>
-            <a:fillRect/>
-          </a:stretch>
-        </p:blipFill>
-        <p:spPr>
-          <a:xfrm>
-            <a:off x="1856736" y="1280160"/>
-            <a:ext cx="8478528" cy="5432980"/>
-          </a:xfrm>
-        </p:spPr>
-      </p:pic>
-    </p:spTree>
-    <p:extLst>
-      <p:ext uri="{BB962C8B-B14F-4D97-AF65-F5344CB8AC3E}">
-        <p14:creationId xmlns:p14="http://schemas.microsoft.com/office/powerpoint/2010/main" val="2574989656"/>
       </p:ext>
     </p:extLst>
   </p:cSld>
